--- a/classes/parte-5-explotacion-de-sistemas-y-binarios/123-bypass-de-protecciones-ret2libc/clase-123-presentacion.pptx
+++ b/classes/parte-5-explotacion-de-sistemas-y-binarios/123-bypass-de-protecciones-ret2libc/clase-123-presentacion.pptx
@@ -17,6 +17,9 @@
     <p:sldId id="265" r:id="rId16"/>
     <p:sldId id="266" r:id="rId17"/>
     <p:sldId id="267" r:id="rId18"/>
+    <p:sldId id="268" r:id="rId19"/>
+    <p:sldId id="269" r:id="rId20"/>
+    <p:sldId id="270" r:id="rId21"/>
   </p:sldIdLst>
   <p:sldSz cx="9144000" cy="6858000" type="screen4x3"/>
   <p:notesSz cx="6858000" cy="9144000"/>
@@ -3198,7 +3201,7 @@
                   <a:srgbClr val="0B3D2E"/>
                 </a:solidFill>
               </a:rPr>
-              <a:t>⚠️ Errores comunes</a:t>
+              <a:t>✍️ Ejercicios</a:t>
             </a:r>
           </a:p>
         </p:txBody>
@@ -3236,67 +3239,82 @@
                   <a:srgbClr val="22282E"/>
                 </a:solidFill>
               </a:rPr>
-              <a:t>•  Shell no aparece, crash en system — Stack desalineado; añade gadget ret</a:t>
-            </a:r>
-          </a:p>
-          <a:p>
-            <a:pPr>
-              <a:spcAft>
-                <a:spcPts val="600"/>
-              </a:spcAft>
-            </a:pPr>
-            <a:r>
-              <a:rPr sz="1500">
-                <a:solidFill>
-                  <a:srgbClr val="22282E"/>
-                </a:solidFill>
-              </a:rPr>
-              <a:t>•  Base de libc absurda — Offset de símbolo de otra versión de libc; usa la correcta</a:t>
-            </a:r>
-          </a:p>
-          <a:p>
-            <a:pPr>
-              <a:spcAft>
-                <a:spcPts val="600"/>
-              </a:spcAft>
-            </a:pPr>
-            <a:r>
-              <a:rPr sz="1500">
-                <a:solidFill>
-                  <a:srgbClr val="22282E"/>
-                </a:solidFill>
-              </a:rPr>
-              <a:t>•  Fuga da valor corto — Faltó ljust(8,\x00) al desempaquetar</a:t>
-            </a:r>
-          </a:p>
-          <a:p>
-            <a:pPr>
-              <a:spcAft>
-                <a:spcPts val="600"/>
-              </a:spcAft>
-            </a:pPr>
-            <a:r>
-              <a:rPr sz="1500">
-                <a:solidFill>
-                  <a:srgbClr val="22282E"/>
-                </a:solidFill>
-              </a:rPr>
-              <a:t>•  pop rdi no encontrado — Búscalo en libc, no solo en el binario</a:t>
-            </a:r>
-          </a:p>
-          <a:p>
-            <a:pPr>
-              <a:spcAft>
-                <a:spcPts val="600"/>
-              </a:spcAft>
-            </a:pPr>
-            <a:r>
-              <a:rPr sz="1500">
-                <a:solidFill>
-                  <a:srgbClr val="22282E"/>
-                </a:solidFill>
-              </a:rPr>
-              <a:t>•  Funciona sin ASLR pero no con él — La fuga falló; revisa fase 1</a:t>
+              <a:t>•  Repite el ataque calculando la base a partir de otra función filtrada (printf).</a:t>
+            </a:r>
+          </a:p>
+          <a:p>
+            <a:pPr>
+              <a:spcAft>
+                <a:spcPts val="600"/>
+              </a:spcAft>
+            </a:pPr>
+            <a:r>
+              <a:rPr sz="1500">
+                <a:solidFill>
+                  <a:srgbClr val="22282E"/>
+                </a:solidFill>
+              </a:rPr>
+              <a:t>•  Sustituye la cadena de system por un onegadget válido.</a:t>
+            </a:r>
+          </a:p>
+          <a:p>
+            <a:pPr>
+              <a:spcAft>
+                <a:spcPts val="600"/>
+              </a:spcAft>
+            </a:pPr>
+            <a:r>
+              <a:rPr sz="1500">
+                <a:solidFill>
+                  <a:srgbClr val="22282E"/>
+                </a:solidFill>
+              </a:rPr>
+              <a:t>•  Adapta el exploit a 32 bits (argumentos por stack, sin pop rdi).</a:t>
+            </a:r>
+          </a:p>
+          <a:p>
+            <a:pPr>
+              <a:spcAft>
+                <a:spcPts val="600"/>
+              </a:spcAft>
+            </a:pPr>
+            <a:r>
+              <a:rPr sz="1500">
+                <a:solidFill>
+                  <a:srgbClr val="22282E"/>
+                </a:solidFill>
+              </a:rPr>
+              <a:t>•  Explica por qué necesitas volver a main tras la fuga.</a:t>
+            </a:r>
+          </a:p>
+          <a:p>
+            <a:pPr>
+              <a:spcAft>
+                <a:spcPts val="600"/>
+              </a:spcAft>
+            </a:pPr>
+            <a:r>
+              <a:rPr sz="1500">
+                <a:solidFill>
+                  <a:srgbClr val="22282E"/>
+                </a:solidFill>
+              </a:rPr>
+              <a:t>•  Automatiza la descarga de la libc correcta con libc-database.</a:t>
+            </a:r>
+          </a:p>
+          <a:p>
+            <a:pPr>
+              <a:spcAft>
+                <a:spcPts val="600"/>
+              </a:spcAft>
+            </a:pPr>
+            <a:r>
+              <a:rPr sz="1500">
+                <a:solidFill>
+                  <a:srgbClr val="22282E"/>
+                </a:solidFill>
+              </a:rPr>
+              <a:t>•  Documenta qué falla si usas una libc de versión distinta.</a:t>
             </a:r>
           </a:p>
         </p:txBody>
@@ -3347,7 +3365,7 @@
                   <a:srgbClr val="0B3D2E"/>
                 </a:solidFill>
               </a:rPr>
-              <a:t>❓ Preguntas frecuentes</a:t>
+              <a:t>📝 Reto verificable</a:t>
             </a:r>
           </a:p>
         </p:txBody>
@@ -3385,67 +3403,52 @@
                   <a:srgbClr val="22282E"/>
                 </a:solidFill>
               </a:rPr>
-              <a:t>•  ❓ ¿Por qué ret2libc y no shellcode? Porque NX impide ejecutar el stack; libc ya es ejecutable.</a:t>
-            </a:r>
-          </a:p>
-          <a:p>
-            <a:pPr>
-              <a:spcAft>
-                <a:spcPts val="600"/>
-              </a:spcAft>
-            </a:pPr>
-            <a:r>
-              <a:rPr sz="1500">
-                <a:solidFill>
-                  <a:srgbClr val="22282E"/>
-                </a:solidFill>
-              </a:rPr>
-              <a:t>•  ❓ ¿Necesito la libc exacta? Sí: los offsets de system//bin/sh dependen de la versión.</a:t>
-            </a:r>
-          </a:p>
-          <a:p>
-            <a:pPr>
-              <a:spcAft>
-                <a:spcPts val="600"/>
-              </a:spcAft>
-            </a:pPr>
-            <a:r>
-              <a:rPr sz="1500">
-                <a:solidFill>
-                  <a:srgbClr val="22282E"/>
-                </a:solidFill>
-              </a:rPr>
-              <a:t>•  Identifícala con libc-database.</a:t>
-            </a:r>
-          </a:p>
-          <a:p>
-            <a:pPr>
-              <a:spcAft>
-                <a:spcPts val="600"/>
-              </a:spcAft>
-            </a:pPr>
-            <a:r>
-              <a:rPr sz="1500">
-                <a:solidFill>
-                  <a:srgbClr val="22282E"/>
-                </a:solidFill>
-              </a:rPr>
-              <a:t>•  ❓ ¿onegadget siempre funciona? No: exige que ciertos registros valgan algo concreto; verifica</a:t>
-            </a:r>
-          </a:p>
-          <a:p>
-            <a:pPr>
-              <a:spcAft>
-                <a:spcPts val="600"/>
-              </a:spcAft>
-            </a:pPr>
-            <a:r>
-              <a:rPr sz="1500">
-                <a:solidFill>
-                  <a:srgbClr val="22282E"/>
-                </a:solidFill>
-              </a:rPr>
-              <a:t>•  sus constraints.</a:t>
+              <a:t>•  Entrega un exploit ret2libc que abra una shell interactiva contra tu binario NX (sin PIE/canary),</a:t>
+            </a:r>
+          </a:p>
+          <a:p>
+            <a:pPr>
+              <a:spcAft>
+                <a:spcPts val="600"/>
+              </a:spcAft>
+            </a:pPr>
+            <a:r>
+              <a:rPr sz="1500">
+                <a:solidFill>
+                  <a:srgbClr val="22282E"/>
+                </a:solidFill>
+              </a:rPr>
+              <a:t>•  calculando la base de libc en tiempo de ejecución.</a:t>
+            </a:r>
+          </a:p>
+          <a:p>
+            <a:pPr>
+              <a:spcAft>
+                <a:spcPts val="600"/>
+              </a:spcAft>
+            </a:pPr>
+            <a:r>
+              <a:rPr sz="1500">
+                <a:solidFill>
+                  <a:srgbClr val="22282E"/>
+                </a:solidFill>
+              </a:rPr>
+              <a:t>•  Criterio de aceptación: p.interactive() te da una shell donde id responde, y el exploit</a:t>
+            </a:r>
+          </a:p>
+          <a:p>
+            <a:pPr>
+              <a:spcAft>
+                <a:spcPts val="600"/>
+              </a:spcAft>
+            </a:pPr>
+            <a:r>
+              <a:rPr sz="1500">
+                <a:solidFill>
+                  <a:srgbClr val="22282E"/>
+                </a:solidFill>
+              </a:rPr>
+              <a:t>•  funciona con ASLR activado gracias a la fuga.</a:t>
             </a:r>
           </a:p>
         </p:txBody>
@@ -3496,7 +3499,7 @@
                   <a:srgbClr val="0B3D2E"/>
                 </a:solidFill>
               </a:rPr>
-              <a:t>🔗 Referencias</a:t>
+              <a:t>⚠️ Errores comunes</a:t>
             </a:r>
           </a:p>
         </p:txBody>
@@ -3534,6 +3537,304 @@
                   <a:srgbClr val="22282E"/>
                 </a:solidFill>
               </a:rPr>
+              <a:t>•  Shell no aparece, crash en system — Stack desalineado; añade gadget ret</a:t>
+            </a:r>
+          </a:p>
+          <a:p>
+            <a:pPr>
+              <a:spcAft>
+                <a:spcPts val="600"/>
+              </a:spcAft>
+            </a:pPr>
+            <a:r>
+              <a:rPr sz="1500">
+                <a:solidFill>
+                  <a:srgbClr val="22282E"/>
+                </a:solidFill>
+              </a:rPr>
+              <a:t>•  Base de libc absurda — Offset de símbolo de otra versión de libc; usa la correcta</a:t>
+            </a:r>
+          </a:p>
+          <a:p>
+            <a:pPr>
+              <a:spcAft>
+                <a:spcPts val="600"/>
+              </a:spcAft>
+            </a:pPr>
+            <a:r>
+              <a:rPr sz="1500">
+                <a:solidFill>
+                  <a:srgbClr val="22282E"/>
+                </a:solidFill>
+              </a:rPr>
+              <a:t>•  Fuga da valor corto — Faltó ljust(8,\x00) al desempaquetar</a:t>
+            </a:r>
+          </a:p>
+          <a:p>
+            <a:pPr>
+              <a:spcAft>
+                <a:spcPts val="600"/>
+              </a:spcAft>
+            </a:pPr>
+            <a:r>
+              <a:rPr sz="1500">
+                <a:solidFill>
+                  <a:srgbClr val="22282E"/>
+                </a:solidFill>
+              </a:rPr>
+              <a:t>•  pop rdi no encontrado — Búscalo en libc, no solo en el binario</a:t>
+            </a:r>
+          </a:p>
+          <a:p>
+            <a:pPr>
+              <a:spcAft>
+                <a:spcPts val="600"/>
+              </a:spcAft>
+            </a:pPr>
+            <a:r>
+              <a:rPr sz="1500">
+                <a:solidFill>
+                  <a:srgbClr val="22282E"/>
+                </a:solidFill>
+              </a:rPr>
+              <a:t>•  Funciona sin ASLR pero no con él — La fuga falló; revisa fase 1</a:t>
+            </a:r>
+          </a:p>
+        </p:txBody>
+      </p:sp>
+    </p:spTree>
+  </p:cSld>
+  <p:clrMapOvr>
+    <a:masterClrMapping/>
+  </p:clrMapOvr>
+</p:sld>
+</file>
+
+<file path=ppt/slides/slide13.xml><?xml version="1.0" encoding="utf-8"?>
+<p:sld xmlns:a="http://schemas.openxmlformats.org/drawingml/2006/main" xmlns:p="http://schemas.openxmlformats.org/presentationml/2006/main" xmlns:r="http://schemas.openxmlformats.org/officeDocument/2006/relationships">
+  <p:cSld>
+    <p:spTree>
+      <p:nvGrpSpPr>
+        <p:cNvPr id="1" name=""/>
+        <p:cNvGrpSpPr/>
+        <p:nvPr/>
+      </p:nvGrpSpPr>
+      <p:grpSpPr/>
+      <p:sp>
+        <p:nvSpPr>
+          <p:cNvPr id="2" name="TextBox 1"/>
+          <p:cNvSpPr txBox="1"/>
+          <p:nvPr/>
+        </p:nvSpPr>
+        <p:spPr>
+          <a:xfrm>
+            <a:off x="457200" y="320040"/>
+            <a:ext cx="8229600" cy="822960"/>
+          </a:xfrm>
+          <a:prstGeom prst="rect">
+            <a:avLst/>
+          </a:prstGeom>
+          <a:noFill/>
+        </p:spPr>
+        <p:txBody>
+          <a:bodyPr wrap="square">
+            <a:spAutoFit/>
+          </a:bodyPr>
+          <a:lstStyle/>
+          <a:p>
+            <a:r>
+              <a:rPr sz="2600" b="1">
+                <a:solidFill>
+                  <a:srgbClr val="0B3D2E"/>
+                </a:solidFill>
+              </a:rPr>
+              <a:t>❓ Preguntas frecuentes</a:t>
+            </a:r>
+          </a:p>
+        </p:txBody>
+      </p:sp>
+      <p:sp>
+        <p:nvSpPr>
+          <p:cNvPr id="3" name="TextBox 2"/>
+          <p:cNvSpPr txBox="1"/>
+          <p:nvPr/>
+        </p:nvSpPr>
+        <p:spPr>
+          <a:xfrm>
+            <a:off x="457200" y="1280160"/>
+            <a:ext cx="8229600" cy="4937760"/>
+          </a:xfrm>
+          <a:prstGeom prst="rect">
+            <a:avLst/>
+          </a:prstGeom>
+          <a:noFill/>
+        </p:spPr>
+        <p:txBody>
+          <a:bodyPr wrap="square">
+            <a:spAutoFit/>
+          </a:bodyPr>
+          <a:lstStyle/>
+          <a:p>
+            <a:pPr>
+              <a:spcAft>
+                <a:spcPts val="600"/>
+              </a:spcAft>
+            </a:pPr>
+            <a:r>
+              <a:rPr sz="1500">
+                <a:solidFill>
+                  <a:srgbClr val="22282E"/>
+                </a:solidFill>
+              </a:rPr>
+              <a:t>•  ❓ ¿Por qué ret2libc y no shellcode? Porque NX impide ejecutar el stack; libc ya es ejecutable.</a:t>
+            </a:r>
+          </a:p>
+          <a:p>
+            <a:pPr>
+              <a:spcAft>
+                <a:spcPts val="600"/>
+              </a:spcAft>
+            </a:pPr>
+            <a:r>
+              <a:rPr sz="1500">
+                <a:solidFill>
+                  <a:srgbClr val="22282E"/>
+                </a:solidFill>
+              </a:rPr>
+              <a:t>•  ❓ ¿Necesito la libc exacta? Sí: los offsets de system//bin/sh dependen de la versión.</a:t>
+            </a:r>
+          </a:p>
+          <a:p>
+            <a:pPr>
+              <a:spcAft>
+                <a:spcPts val="600"/>
+              </a:spcAft>
+            </a:pPr>
+            <a:r>
+              <a:rPr sz="1500">
+                <a:solidFill>
+                  <a:srgbClr val="22282E"/>
+                </a:solidFill>
+              </a:rPr>
+              <a:t>•  Identifícala con libc-database.</a:t>
+            </a:r>
+          </a:p>
+          <a:p>
+            <a:pPr>
+              <a:spcAft>
+                <a:spcPts val="600"/>
+              </a:spcAft>
+            </a:pPr>
+            <a:r>
+              <a:rPr sz="1500">
+                <a:solidFill>
+                  <a:srgbClr val="22282E"/>
+                </a:solidFill>
+              </a:rPr>
+              <a:t>•  ❓ ¿onegadget siempre funciona? No: exige que ciertos registros valgan algo concreto; verifica</a:t>
+            </a:r>
+          </a:p>
+          <a:p>
+            <a:pPr>
+              <a:spcAft>
+                <a:spcPts val="600"/>
+              </a:spcAft>
+            </a:pPr>
+            <a:r>
+              <a:rPr sz="1500">
+                <a:solidFill>
+                  <a:srgbClr val="22282E"/>
+                </a:solidFill>
+              </a:rPr>
+              <a:t>•  sus constraints.</a:t>
+            </a:r>
+          </a:p>
+        </p:txBody>
+      </p:sp>
+    </p:spTree>
+  </p:cSld>
+  <p:clrMapOvr>
+    <a:masterClrMapping/>
+  </p:clrMapOvr>
+</p:sld>
+</file>
+
+<file path=ppt/slides/slide14.xml><?xml version="1.0" encoding="utf-8"?>
+<p:sld xmlns:a="http://schemas.openxmlformats.org/drawingml/2006/main" xmlns:p="http://schemas.openxmlformats.org/presentationml/2006/main" xmlns:r="http://schemas.openxmlformats.org/officeDocument/2006/relationships">
+  <p:cSld>
+    <p:spTree>
+      <p:nvGrpSpPr>
+        <p:cNvPr id="1" name=""/>
+        <p:cNvGrpSpPr/>
+        <p:nvPr/>
+      </p:nvGrpSpPr>
+      <p:grpSpPr/>
+      <p:sp>
+        <p:nvSpPr>
+          <p:cNvPr id="2" name="TextBox 1"/>
+          <p:cNvSpPr txBox="1"/>
+          <p:nvPr/>
+        </p:nvSpPr>
+        <p:spPr>
+          <a:xfrm>
+            <a:off x="457200" y="320040"/>
+            <a:ext cx="8229600" cy="822960"/>
+          </a:xfrm>
+          <a:prstGeom prst="rect">
+            <a:avLst/>
+          </a:prstGeom>
+          <a:noFill/>
+        </p:spPr>
+        <p:txBody>
+          <a:bodyPr wrap="square">
+            <a:spAutoFit/>
+          </a:bodyPr>
+          <a:lstStyle/>
+          <a:p>
+            <a:r>
+              <a:rPr sz="2600" b="1">
+                <a:solidFill>
+                  <a:srgbClr val="0B3D2E"/>
+                </a:solidFill>
+              </a:rPr>
+              <a:t>🔗 Referencias</a:t>
+            </a:r>
+          </a:p>
+        </p:txBody>
+      </p:sp>
+      <p:sp>
+        <p:nvSpPr>
+          <p:cNvPr id="3" name="TextBox 2"/>
+          <p:cNvSpPr txBox="1"/>
+          <p:nvPr/>
+        </p:nvSpPr>
+        <p:spPr>
+          <a:xfrm>
+            <a:off x="457200" y="1280160"/>
+            <a:ext cx="8229600" cy="4937760"/>
+          </a:xfrm>
+          <a:prstGeom prst="rect">
+            <a:avLst/>
+          </a:prstGeom>
+          <a:noFill/>
+        </p:spPr>
+        <p:txBody>
+          <a:bodyPr wrap="square">
+            <a:spAutoFit/>
+          </a:bodyPr>
+          <a:lstStyle/>
+          <a:p>
+            <a:pPr>
+              <a:spcAft>
+                <a:spcPts val="600"/>
+              </a:spcAft>
+            </a:pPr>
+            <a:r>
+              <a:rPr sz="1500">
+                <a:solidFill>
+                  <a:srgbClr val="22282E"/>
+                </a:solidFill>
+              </a:rPr>
               <a:t>•  Anley et al. The Shellcoder's Handbook, 2e. Wiley.</a:t>
             </a:r>
           </a:p>
@@ -3584,6 +3885,81 @@
           </a:p>
         </p:txBody>
       </p:sp>
+    </p:spTree>
+  </p:cSld>
+  <p:clrMapOvr>
+    <a:masterClrMapping/>
+  </p:clrMapOvr>
+</p:sld>
+</file>
+
+<file path=ppt/slides/slide15.xml><?xml version="1.0" encoding="utf-8"?>
+<p:sld xmlns:a="http://schemas.openxmlformats.org/drawingml/2006/main" xmlns:p="http://schemas.openxmlformats.org/presentationml/2006/main" xmlns:r="http://schemas.openxmlformats.org/officeDocument/2006/relationships">
+  <p:cSld>
+    <p:spTree>
+      <p:nvGrpSpPr>
+        <p:cNvPr id="1" name=""/>
+        <p:cNvGrpSpPr/>
+        <p:nvPr/>
+      </p:nvGrpSpPr>
+      <p:grpSpPr/>
+      <p:sp>
+        <p:nvSpPr>
+          <p:cNvPr id="2" name="TextBox 1"/>
+          <p:cNvSpPr txBox="1"/>
+          <p:nvPr/>
+        </p:nvSpPr>
+        <p:spPr>
+          <a:xfrm>
+            <a:off x="457200" y="274320"/>
+            <a:ext cx="8229600" cy="640080"/>
+          </a:xfrm>
+          <a:prstGeom prst="rect">
+            <a:avLst/>
+          </a:prstGeom>
+          <a:noFill/>
+        </p:spPr>
+        <p:txBody>
+          <a:bodyPr wrap="square">
+            <a:spAutoFit/>
+          </a:bodyPr>
+          <a:lstStyle/>
+          <a:p>
+            <a:r>
+              <a:rPr sz="2200" b="1">
+                <a:solidFill>
+                  <a:srgbClr val="0B3D2E"/>
+                </a:solidFill>
+              </a:rPr>
+              <a:t>Diagrama de la clase</a:t>
+            </a:r>
+          </a:p>
+        </p:txBody>
+      </p:sp>
+      <p:pic>
+        <p:nvPicPr>
+          <p:cNvPr id="3" name="Picture 2" descr="165df34dfa367934.png"/>
+          <p:cNvPicPr>
+            <a:picLocks noChangeAspect="1"/>
+          </p:cNvPicPr>
+          <p:nvPr/>
+        </p:nvPicPr>
+        <p:blipFill>
+          <a:blip r:embed="rId2"/>
+          <a:stretch>
+            <a:fillRect/>
+          </a:stretch>
+        </p:blipFill>
+        <p:spPr>
+          <a:xfrm>
+            <a:off x="3646734" y="1097280"/>
+            <a:ext cx="1850532" cy="5303520"/>
+          </a:xfrm>
+          <a:prstGeom prst="rect">
+            <a:avLst/>
+          </a:prstGeom>
+        </p:spPr>
+      </p:pic>
     </p:spTree>
   </p:cSld>
   <p:clrMapOvr>
@@ -4107,7 +4483,7 @@
                   <a:srgbClr val="0B3D2E"/>
                 </a:solidFill>
               </a:rPr>
-              <a:t>📖 Definiciones y características</a:t>
+              <a:t>🧠 Explicación en profundidad</a:t>
             </a:r>
           </a:p>
         </p:txBody>
@@ -4145,97 +4521,97 @@
                   <a:srgbClr val="22282E"/>
                 </a:solidFill>
               </a:rPr>
-              <a:t>•  ret2libc: técnica que retorna a funciones de la librería C (p. ej. system) en vez de a</a:t>
-            </a:r>
-          </a:p>
-          <a:p>
-            <a:pPr>
-              <a:spcAft>
-                <a:spcPts val="600"/>
-              </a:spcAft>
-            </a:pPr>
-            <a:r>
-              <a:rPr sz="1500">
-                <a:solidFill>
-                  <a:srgbClr val="22282E"/>
-                </a:solidFill>
-              </a:rPr>
-              <a:t>•  shellcode. Clave: evade NX porque libc es ejecutable.</a:t>
-            </a:r>
-          </a:p>
-          <a:p>
-            <a:pPr>
-              <a:spcAft>
-                <a:spcPts val="600"/>
-              </a:spcAft>
-            </a:pPr>
-            <a:r>
-              <a:rPr sz="1500">
-                <a:solidFill>
-                  <a:srgbClr val="22282E"/>
-                </a:solidFill>
-              </a:rPr>
-              <a:t>•  GOT (Global Offset Table): tabla con direcciones resueltas de funciones de librería. Clave:</a:t>
-            </a:r>
-          </a:p>
-          <a:p>
-            <a:pPr>
-              <a:spcAft>
-                <a:spcPts val="600"/>
-              </a:spcAft>
-            </a:pPr>
-            <a:r>
-              <a:rPr sz="1500">
-                <a:solidFill>
-                  <a:srgbClr val="22282E"/>
-                </a:solidFill>
-              </a:rPr>
-              <a:t>•  leer una entrada revela una dirección real de libc → base.</a:t>
-            </a:r>
-          </a:p>
-          <a:p>
-            <a:pPr>
-              <a:spcAft>
-                <a:spcPts val="600"/>
-              </a:spcAft>
-            </a:pPr>
-            <a:r>
-              <a:rPr sz="1500">
-                <a:solidFill>
-                  <a:srgbClr val="22282E"/>
-                </a:solidFill>
-              </a:rPr>
-              <a:t>•  Info leak: primitiva que expone una dirección de memoria. Clave: imprescindible contra</a:t>
-            </a:r>
-          </a:p>
-          <a:p>
-            <a:pPr>
-              <a:spcAft>
-                <a:spcPts val="600"/>
-              </a:spcAft>
-            </a:pPr>
-            <a:r>
-              <a:rPr sz="1500">
-                <a:solidFill>
-                  <a:srgbClr val="22282E"/>
-                </a:solidFill>
-              </a:rPr>
-              <a:t>•  ASLR/PIE.</a:t>
-            </a:r>
-          </a:p>
-          <a:p>
-            <a:pPr>
-              <a:spcAft>
-                <a:spcPts val="600"/>
-              </a:spcAft>
-            </a:pPr>
-            <a:r>
-              <a:rPr sz="1500">
-                <a:solidFill>
-                  <a:srgbClr val="22282E"/>
-                </a:solidFill>
-              </a:rPr>
-              <a:t>•  Base de libc: direcciónfiltrada - offsetdelsímboloenlibc. Clave: con la base calculas</a:t>
+              <a:t>•  ret2libc es la primera técnica de reutilización de código y la respuesta directa a DEP/NX</a:t>
+            </a:r>
+          </a:p>
+          <a:p>
+            <a:pPr>
+              <a:spcAft>
+                <a:spcPts val="600"/>
+              </a:spcAft>
+            </a:pPr>
+            <a:r>
+              <a:rPr sz="1500">
+                <a:solidFill>
+                  <a:srgbClr val="22282E"/>
+                </a:solidFill>
+              </a:rPr>
+              <a:t>•  (clase 122): si la pila no es ejecutable, el atacante deja de inyectar shellcode y en su lugar</a:t>
+            </a:r>
+          </a:p>
+          <a:p>
+            <a:pPr>
+              <a:spcAft>
+                <a:spcPts val="600"/>
+              </a:spcAft>
+            </a:pPr>
+            <a:r>
+              <a:rPr sz="1500">
+                <a:solidFill>
+                  <a:srgbClr val="22282E"/>
+                </a:solidFill>
+              </a:rPr>
+              <a:t>•  salta a código que ya existe y ya es ejecutable —las funciones de la biblioteca C (libc),</a:t>
+            </a:r>
+          </a:p>
+          <a:p>
+            <a:pPr>
+              <a:spcAft>
+                <a:spcPts val="600"/>
+              </a:spcAft>
+            </a:pPr>
+            <a:r>
+              <a:rPr sz="1500">
+                <a:solidFill>
+                  <a:srgbClr val="22282E"/>
+                </a:solidFill>
+              </a:rPr>
+              <a:t>•  que está cargada en todo proceso—. En lugar de escribir un shellcode que llame a execve, se</a:t>
+            </a:r>
+          </a:p>
+          <a:p>
+            <a:pPr>
+              <a:spcAft>
+                <a:spcPts val="600"/>
+              </a:spcAft>
+            </a:pPr>
+            <a:r>
+              <a:rPr sz="1500">
+                <a:solidFill>
+                  <a:srgbClr val="22282E"/>
+                </a:solidFill>
+              </a:rPr>
+              <a:t>•  redirige la ejecución a la función system de libc con el argumento "/bin/sh", cadena</a:t>
+            </a:r>
+          </a:p>
+          <a:p>
+            <a:pPr>
+              <a:spcAft>
+                <a:spcPts val="600"/>
+              </a:spcAft>
+            </a:pPr>
+            <a:r>
+              <a:rPr sz="1500">
+                <a:solidFill>
+                  <a:srgbClr val="22282E"/>
+                </a:solidFill>
+              </a:rPr>
+              <a:t>•  que además suele existir dentro de la propia libc. El resultado es el mismo —una shell— pero sin</a:t>
+            </a:r>
+          </a:p>
+          <a:p>
+            <a:pPr>
+              <a:spcAft>
+                <a:spcPts val="600"/>
+              </a:spcAft>
+            </a:pPr>
+            <a:r>
+              <a:rPr sz="1500">
+                <a:solidFill>
+                  <a:srgbClr val="22282E"/>
+                </a:solidFill>
+              </a:rPr>
+              <a:t>•  ejecutar un solo byte de código propio, lo que hace irrelevante a NX.</a:t>
             </a:r>
           </a:p>
         </p:txBody>
@@ -4286,7 +4662,7 @@
                   <a:srgbClr val="0B3D2E"/>
                 </a:solidFill>
               </a:rPr>
-              <a:t>🧰 Herramientas y preparación</a:t>
+              <a:t>📖 Definiciones y características</a:t>
             </a:r>
           </a:p>
         </p:txBody>
@@ -4324,67 +4700,97 @@
                   <a:srgbClr val="22282E"/>
                 </a:solidFill>
               </a:rPr>
-              <a:t>•  pip install pwntools</a:t>
-            </a:r>
-          </a:p>
-          <a:p>
-            <a:pPr>
-              <a:spcAft>
-                <a:spcPts val="600"/>
-              </a:spcAft>
-            </a:pPr>
-            <a:r>
-              <a:rPr sz="1500">
-                <a:solidFill>
-                  <a:srgbClr val="22282E"/>
-                </a:solidFill>
-              </a:rPr>
-              <a:t>•  sudo apt install -y gdb</a:t>
-            </a:r>
-          </a:p>
-          <a:p>
-            <a:pPr>
-              <a:spcAft>
-                <a:spcPts val="600"/>
-              </a:spcAft>
-            </a:pPr>
-            <a:r>
-              <a:rPr sz="1500">
-                <a:solidFill>
-                  <a:srgbClr val="22282E"/>
-                </a:solidFill>
-              </a:rPr>
-              <a:t>•  pip install ROPgadget</a:t>
-            </a:r>
-          </a:p>
-          <a:p>
-            <a:pPr>
-              <a:spcAft>
-                <a:spcPts val="600"/>
-              </a:spcAft>
-            </a:pPr>
-            <a:r>
-              <a:rPr sz="1500">
-                <a:solidFill>
-                  <a:srgbClr val="22282E"/>
-                </a:solidFill>
-              </a:rPr>
-              <a:t>•  Usa un binario con NX activo pero sin PIE ni canary para el primer ret2libc, y ten a mano la libc</a:t>
-            </a:r>
-          </a:p>
-          <a:p>
-            <a:pPr>
-              <a:spcAft>
-                <a:spcPts val="600"/>
-              </a:spcAft>
-            </a:pPr>
-            <a:r>
-              <a:rPr sz="1500">
-                <a:solidFill>
-                  <a:srgbClr val="22282E"/>
-                </a:solidFill>
-              </a:rPr>
-              <a:t>•  exacta del sistema (ldd ./bin).</a:t>
+              <a:t>•  ret2libc: técnica que retorna a funciones de la librería C (p. ej. system) en vez de a</a:t>
+            </a:r>
+          </a:p>
+          <a:p>
+            <a:pPr>
+              <a:spcAft>
+                <a:spcPts val="600"/>
+              </a:spcAft>
+            </a:pPr>
+            <a:r>
+              <a:rPr sz="1500">
+                <a:solidFill>
+                  <a:srgbClr val="22282E"/>
+                </a:solidFill>
+              </a:rPr>
+              <a:t>•  shellcode. Clave: evade NX porque libc es ejecutable.</a:t>
+            </a:r>
+          </a:p>
+          <a:p>
+            <a:pPr>
+              <a:spcAft>
+                <a:spcPts val="600"/>
+              </a:spcAft>
+            </a:pPr>
+            <a:r>
+              <a:rPr sz="1500">
+                <a:solidFill>
+                  <a:srgbClr val="22282E"/>
+                </a:solidFill>
+              </a:rPr>
+              <a:t>•  GOT (Global Offset Table): tabla con direcciones resueltas de funciones de librería. Clave:</a:t>
+            </a:r>
+          </a:p>
+          <a:p>
+            <a:pPr>
+              <a:spcAft>
+                <a:spcPts val="600"/>
+              </a:spcAft>
+            </a:pPr>
+            <a:r>
+              <a:rPr sz="1500">
+                <a:solidFill>
+                  <a:srgbClr val="22282E"/>
+                </a:solidFill>
+              </a:rPr>
+              <a:t>•  leer una entrada revela una dirección real de libc → base.</a:t>
+            </a:r>
+          </a:p>
+          <a:p>
+            <a:pPr>
+              <a:spcAft>
+                <a:spcPts val="600"/>
+              </a:spcAft>
+            </a:pPr>
+            <a:r>
+              <a:rPr sz="1500">
+                <a:solidFill>
+                  <a:srgbClr val="22282E"/>
+                </a:solidFill>
+              </a:rPr>
+              <a:t>•  Info leak: primitiva que expone una dirección de memoria. Clave: imprescindible contra</a:t>
+            </a:r>
+          </a:p>
+          <a:p>
+            <a:pPr>
+              <a:spcAft>
+                <a:spcPts val="600"/>
+              </a:spcAft>
+            </a:pPr>
+            <a:r>
+              <a:rPr sz="1500">
+                <a:solidFill>
+                  <a:srgbClr val="22282E"/>
+                </a:solidFill>
+              </a:rPr>
+              <a:t>•  ASLR/PIE.</a:t>
+            </a:r>
+          </a:p>
+          <a:p>
+            <a:pPr>
+              <a:spcAft>
+                <a:spcPts val="600"/>
+              </a:spcAft>
+            </a:pPr>
+            <a:r>
+              <a:rPr sz="1500">
+                <a:solidFill>
+                  <a:srgbClr val="22282E"/>
+                </a:solidFill>
+              </a:rPr>
+              <a:t>•  Base de libc: direcciónfiltrada - offsetdelsímboloenlibc. Clave: con la base calculas</a:t>
             </a:r>
           </a:p>
         </p:txBody>
@@ -4435,7 +4841,7 @@
                   <a:srgbClr val="0B3D2E"/>
                 </a:solidFill>
               </a:rPr>
-              <a:t>🧪 Laboratorio guiado</a:t>
+              <a:t>📔 Glosario</a:t>
             </a:r>
           </a:p>
         </p:txBody>
@@ -4473,97 +4879,97 @@
                   <a:srgbClr val="22282E"/>
                 </a:solidFill>
               </a:rPr>
-              <a:t>•  Audita el binario objetivo: checksec ./ret2libc. Debe mostrar NX enabled, No PIE, No canary.</a:t>
-            </a:r>
-          </a:p>
-          <a:p>
-            <a:pPr>
-              <a:spcAft>
-                <a:spcPts val="600"/>
-              </a:spcAft>
-            </a:pPr>
-            <a:r>
-              <a:rPr sz="1500">
-                <a:solidFill>
-                  <a:srgbClr val="22282E"/>
-                </a:solidFill>
-              </a:rPr>
-              <a:t>•  Localiza gadgets y la cadena /bin/sh:</a:t>
-            </a:r>
-          </a:p>
-          <a:p>
-            <a:pPr>
-              <a:spcAft>
-                <a:spcPts val="600"/>
-              </a:spcAft>
-            </a:pPr>
-            <a:r>
-              <a:rPr sz="1500">
-                <a:solidFill>
-                  <a:srgbClr val="22282E"/>
-                </a:solidFill>
-              </a:rPr>
-              <a:t>•  ROPgadget --binary /lib/x8664-linux-gnu/libc.so.6 | grep ": pop rdi ; ret"</a:t>
-            </a:r>
-          </a:p>
-          <a:p>
-            <a:pPr>
-              <a:spcAft>
-                <a:spcPts val="600"/>
-              </a:spcAft>
-            </a:pPr>
-            <a:r>
-              <a:rPr sz="1500">
-                <a:solidFill>
-                  <a:srgbClr val="22282E"/>
-                </a:solidFill>
-              </a:rPr>
-              <a:t>•  strings -a -t x /lib/x8664-linux-gnu/libc.so.6 | grep "/bin/sh"</a:t>
-            </a:r>
-          </a:p>
-          <a:p>
-            <a:pPr>
-              <a:spcAft>
-                <a:spcPts val="600"/>
-              </a:spcAft>
-            </a:pPr>
-            <a:r>
-              <a:rPr sz="1500">
-                <a:solidFill>
-                  <a:srgbClr val="22282E"/>
-                </a:solidFill>
-              </a:rPr>
-              <a:t>•  Fase 1 — fuga: usa un overflow para llamar a puts(GOT['puts']) y luego volver a main:</a:t>
-            </a:r>
-          </a:p>
-          <a:p>
-            <a:pPr>
-              <a:spcAft>
-                <a:spcPts val="600"/>
-              </a:spcAft>
-            </a:pPr>
-            <a:r>
-              <a:rPr sz="1500">
-                <a:solidFill>
-                  <a:srgbClr val="22282E"/>
-                </a:solidFill>
-              </a:rPr>
-              <a:t>•  from pwn import</a:t>
-            </a:r>
-          </a:p>
-          <a:p>
-            <a:pPr>
-              <a:spcAft>
-                <a:spcPts val="600"/>
-              </a:spcAft>
-            </a:pPr>
-            <a:r>
-              <a:rPr sz="1500">
-                <a:solidFill>
-                  <a:srgbClr val="22282E"/>
-                </a:solidFill>
-              </a:rPr>
-              <a:t>•  elf = context.binary = ELF("./ret2libc")</a:t>
+              <a:t>•  Término — Definición concisa</a:t>
+            </a:r>
+          </a:p>
+          <a:p>
+            <a:pPr>
+              <a:spcAft>
+                <a:spcPts val="600"/>
+              </a:spcAft>
+            </a:pPr>
+            <a:r>
+              <a:rPr sz="1500">
+                <a:solidFill>
+                  <a:srgbClr val="22282E"/>
+                </a:solidFill>
+              </a:rPr>
+              <a:t>•  ret2libc — Saltar a funciones de libc en vez de inyectar shellcode</a:t>
+            </a:r>
+          </a:p>
+          <a:p>
+            <a:pPr>
+              <a:spcAft>
+                <a:spcPts val="600"/>
+              </a:spcAft>
+            </a:pPr>
+            <a:r>
+              <a:rPr sz="1500">
+                <a:solidFill>
+                  <a:srgbClr val="22282E"/>
+                </a:solidFill>
+              </a:rPr>
+              <a:t>•  libc — Biblioteca C, cargada en todo proceso; llena de código útil</a:t>
+            </a:r>
+          </a:p>
+          <a:p>
+            <a:pPr>
+              <a:spcAft>
+                <a:spcPts val="600"/>
+              </a:spcAft>
+            </a:pPr>
+            <a:r>
+              <a:rPr sz="1500">
+                <a:solidFill>
+                  <a:srgbClr val="22282E"/>
+                </a:solidFill>
+              </a:rPr>
+              <a:t>•  system("/bin/sh") — Objetivo típico: función de libc que lanza una shell</a:t>
+            </a:r>
+          </a:p>
+          <a:p>
+            <a:pPr>
+              <a:spcAft>
+                <a:spcPts val="600"/>
+              </a:spcAft>
+            </a:pPr>
+            <a:r>
+              <a:rPr sz="1500">
+                <a:solidFill>
+                  <a:srgbClr val="22282E"/>
+                </a:solidFill>
+              </a:rPr>
+              <a:t>•  Info leak — Filtrar una dirección de libc en tiempo de ejecución</a:t>
+            </a:r>
+          </a:p>
+          <a:p>
+            <a:pPr>
+              <a:spcAft>
+                <a:spcPts val="600"/>
+              </a:spcAft>
+            </a:pPr>
+            <a:r>
+              <a:rPr sz="1500">
+                <a:solidFill>
+                  <a:srgbClr val="22282E"/>
+                </a:solidFill>
+              </a:rPr>
+              <a:t>•  GOT — Tabla de punteros resueltos a funciones de librería</a:t>
+            </a:r>
+          </a:p>
+          <a:p>
+            <a:pPr>
+              <a:spcAft>
+                <a:spcPts val="600"/>
+              </a:spcAft>
+            </a:pPr>
+            <a:r>
+              <a:rPr sz="1500">
+                <a:solidFill>
+                  <a:srgbClr val="22282E"/>
+                </a:solidFill>
+              </a:rPr>
+              <a:t>•  PLT — Maquinaria que resuelve y llama a funciones externas</a:t>
             </a:r>
           </a:p>
         </p:txBody>
@@ -4614,7 +5020,7 @@
                   <a:srgbClr val="0B3D2E"/>
                 </a:solidFill>
               </a:rPr>
-              <a:t>✍️ Ejercicios</a:t>
+              <a:t>🧰 Herramientas y preparación</a:t>
             </a:r>
           </a:p>
         </p:txBody>
@@ -4652,82 +5058,22 @@
                   <a:srgbClr val="22282E"/>
                 </a:solidFill>
               </a:rPr>
-              <a:t>•  Repite el ataque calculando la base a partir de otra función filtrada (printf).</a:t>
-            </a:r>
-          </a:p>
-          <a:p>
-            <a:pPr>
-              <a:spcAft>
-                <a:spcPts val="600"/>
-              </a:spcAft>
-            </a:pPr>
-            <a:r>
-              <a:rPr sz="1500">
-                <a:solidFill>
-                  <a:srgbClr val="22282E"/>
-                </a:solidFill>
-              </a:rPr>
-              <a:t>•  Sustituye la cadena de system por un onegadget válido.</a:t>
-            </a:r>
-          </a:p>
-          <a:p>
-            <a:pPr>
-              <a:spcAft>
-                <a:spcPts val="600"/>
-              </a:spcAft>
-            </a:pPr>
-            <a:r>
-              <a:rPr sz="1500">
-                <a:solidFill>
-                  <a:srgbClr val="22282E"/>
-                </a:solidFill>
-              </a:rPr>
-              <a:t>•  Adapta el exploit a 32 bits (argumentos por stack, sin pop rdi).</a:t>
-            </a:r>
-          </a:p>
-          <a:p>
-            <a:pPr>
-              <a:spcAft>
-                <a:spcPts val="600"/>
-              </a:spcAft>
-            </a:pPr>
-            <a:r>
-              <a:rPr sz="1500">
-                <a:solidFill>
-                  <a:srgbClr val="22282E"/>
-                </a:solidFill>
-              </a:rPr>
-              <a:t>•  Explica por qué necesitas volver a main tras la fuga.</a:t>
-            </a:r>
-          </a:p>
-          <a:p>
-            <a:pPr>
-              <a:spcAft>
-                <a:spcPts val="600"/>
-              </a:spcAft>
-            </a:pPr>
-            <a:r>
-              <a:rPr sz="1500">
-                <a:solidFill>
-                  <a:srgbClr val="22282E"/>
-                </a:solidFill>
-              </a:rPr>
-              <a:t>•  Automatiza la descarga de la libc correcta con libc-database.</a:t>
-            </a:r>
-          </a:p>
-          <a:p>
-            <a:pPr>
-              <a:spcAft>
-                <a:spcPts val="600"/>
-              </a:spcAft>
-            </a:pPr>
-            <a:r>
-              <a:rPr sz="1500">
-                <a:solidFill>
-                  <a:srgbClr val="22282E"/>
-                </a:solidFill>
-              </a:rPr>
-              <a:t>•  Documenta qué falla si usas una libc de versión distinta.</a:t>
+              <a:t>•  Usa un binario con NX activo pero sin PIE ni canary para el primer ret2libc, y ten a mano la libc</a:t>
+            </a:r>
+          </a:p>
+          <a:p>
+            <a:pPr>
+              <a:spcAft>
+                <a:spcPts val="600"/>
+              </a:spcAft>
+            </a:pPr>
+            <a:r>
+              <a:rPr sz="1500">
+                <a:solidFill>
+                  <a:srgbClr val="22282E"/>
+                </a:solidFill>
+              </a:rPr>
+              <a:t>•  exacta del sistema (ldd ./bin).</a:t>
             </a:r>
           </a:p>
         </p:txBody>
@@ -4778,7 +5124,7 @@
                   <a:srgbClr val="0B3D2E"/>
                 </a:solidFill>
               </a:rPr>
-              <a:t>📝 Reto verificable</a:t>
+              <a:t>🧪 Laboratorio guiado</a:t>
             </a:r>
           </a:p>
         </p:txBody>
@@ -4816,52 +5162,82 @@
                   <a:srgbClr val="22282E"/>
                 </a:solidFill>
               </a:rPr>
-              <a:t>•  Entrega un exploit ret2libc que abra una shell interactiva contra tu binario NX (sin PIE/canary),</a:t>
-            </a:r>
-          </a:p>
-          <a:p>
-            <a:pPr>
-              <a:spcAft>
-                <a:spcPts val="600"/>
-              </a:spcAft>
-            </a:pPr>
-            <a:r>
-              <a:rPr sz="1500">
-                <a:solidFill>
-                  <a:srgbClr val="22282E"/>
-                </a:solidFill>
-              </a:rPr>
-              <a:t>•  calculando la base de libc en tiempo de ejecución.</a:t>
-            </a:r>
-          </a:p>
-          <a:p>
-            <a:pPr>
-              <a:spcAft>
-                <a:spcPts val="600"/>
-              </a:spcAft>
-            </a:pPr>
-            <a:r>
-              <a:rPr sz="1500">
-                <a:solidFill>
-                  <a:srgbClr val="22282E"/>
-                </a:solidFill>
-              </a:rPr>
-              <a:t>•  Criterio de aceptación: p.interactive() te da una shell donde id responde, y el exploit</a:t>
-            </a:r>
-          </a:p>
-          <a:p>
-            <a:pPr>
-              <a:spcAft>
-                <a:spcPts val="600"/>
-              </a:spcAft>
-            </a:pPr>
-            <a:r>
-              <a:rPr sz="1500">
-                <a:solidFill>
-                  <a:srgbClr val="22282E"/>
-                </a:solidFill>
-              </a:rPr>
-              <a:t>•  funciona con ASLR activado gracias a la fuga.</a:t>
+              <a:t>•  Audita el binario objetivo: checksec ./ret2libc. Debe mostrar NX enabled, No PIE, No canary.</a:t>
+            </a:r>
+          </a:p>
+          <a:p>
+            <a:pPr>
+              <a:spcAft>
+                <a:spcPts val="600"/>
+              </a:spcAft>
+            </a:pPr>
+            <a:r>
+              <a:rPr sz="1500">
+                <a:solidFill>
+                  <a:srgbClr val="22282E"/>
+                </a:solidFill>
+              </a:rPr>
+              <a:t>•  Localiza gadgets y la cadena /bin/sh:</a:t>
+            </a:r>
+          </a:p>
+          <a:p>
+            <a:pPr>
+              <a:spcAft>
+                <a:spcPts val="600"/>
+              </a:spcAft>
+            </a:pPr>
+            <a:r>
+              <a:rPr sz="1500">
+                <a:solidFill>
+                  <a:srgbClr val="22282E"/>
+                </a:solidFill>
+              </a:rPr>
+              <a:t>•  Fase 1 — fuga: usa un overflow para llamar a puts(GOT['puts']) y luego volver a main:</a:t>
+            </a:r>
+          </a:p>
+          <a:p>
+            <a:pPr>
+              <a:spcAft>
+                <a:spcPts val="600"/>
+              </a:spcAft>
+            </a:pPr>
+            <a:r>
+              <a:rPr sz="1500">
+                <a:solidFill>
+                  <a:srgbClr val="22282E"/>
+                </a:solidFill>
+              </a:rPr>
+              <a:t>•  Fase 2 — system("/bin/sh") con la base ya conocida:</a:t>
+            </a:r>
+          </a:p>
+          <a:p>
+            <a:pPr>
+              <a:spcAft>
+                <a:spcPts val="600"/>
+              </a:spcAft>
+            </a:pPr>
+            <a:r>
+              <a:rPr sz="1500">
+                <a:solidFill>
+                  <a:srgbClr val="22282E"/>
+                </a:solidFill>
+              </a:rPr>
+              <a:t>•  Si no hay shell, verifica alineación (añade/quita el gadget ret) y que la libc sea la correcta.</a:t>
+            </a:r>
+          </a:p>
+          <a:p>
+            <a:pPr>
+              <a:spcAft>
+                <a:spcPts val="600"/>
+              </a:spcAft>
+            </a:pPr>
+            <a:r>
+              <a:rPr sz="1500">
+                <a:solidFill>
+                  <a:srgbClr val="22282E"/>
+                </a:solidFill>
+              </a:rPr>
+              <a:t>•  Explora onegadget /lib/.../libc.so.6 como alternativa de una sola dirección.</a:t>
             </a:r>
           </a:p>
         </p:txBody>
